--- a/wada-tue-scoping-review/manuscripts/individual_figures/fig4_conceptual_framework.pptx
+++ b/wada-tue-scoping-review/manuscripts/individual_figures/fig4_conceptual_framework.pptx
@@ -5,9 +5,9 @@
     <p:sldMasterId id="2147483648" r:id="rId1"/>
   </p:sldMasterIdLst>
   <p:sldIdLst>
-    <p:sldId id="256" r:id="rId7"/>
+    <p:sldId id="256" r:id="rId2"/>
   </p:sldIdLst>
-  <p:sldSz cx="12191695" cy="6858000" type="screen4x3"/>
+  <p:sldSz cx="12192000" cy="6858000"/>
   <p:notesSz cx="6858000" cy="9144000"/>
   <p:defaultTextStyle>
     <a:defPPr>
@@ -104,6 +104,22 @@
       </a:defRPr>
     </a:lvl9pPr>
   </p:defaultTextStyle>
+  <p:extLst>
+    <p:ext uri="{EFAFB233-063F-42B5-8137-9DF3F51BA10A}">
+      <p15:sldGuideLst xmlns:p15="http://schemas.microsoft.com/office/powerpoint/2012/main">
+        <p15:guide id="1" orient="horz" pos="2160">
+          <p15:clr>
+            <a:srgbClr val="A4A3A4"/>
+          </p15:clr>
+        </p15:guide>
+        <p15:guide id="2" pos="2880">
+          <p15:clr>
+            <a:srgbClr val="A4A3A4"/>
+          </p15:clr>
+        </p15:guide>
+      </p15:sldGuideLst>
+    </p:ext>
+  </p:extLst>
 </p:presentation>
 </file>
 
@@ -145,10 +161,9 @@
           <a:lstStyle/>
           <a:p>
             <a:r>
-              <a:rPr lang="en-US" smtClean="0"/>
+              <a:rPr lang="en-US"/>
               <a:t>Click to edit Master title style</a:t>
             </a:r>
-            <a:endParaRPr lang="en-US"/>
           </a:p>
         </p:txBody>
       </p:sp>
@@ -264,10 +279,9 @@
           </a:lstStyle>
           <a:p>
             <a:r>
-              <a:rPr lang="en-US" smtClean="0"/>
+              <a:rPr lang="en-US"/>
               <a:t>Click to edit Master subtitle style</a:t>
             </a:r>
-            <a:endParaRPr lang="en-US"/>
           </a:p>
         </p:txBody>
       </p:sp>
@@ -288,7 +302,7 @@
           <a:p>
             <a:fld id="{5BCAD085-E8A6-8845-BD4E-CB4CCA059FC4}" type="datetimeFigureOut">
               <a:rPr lang="en-US" smtClean="0"/>
-              <a:t>1/27/13</a:t>
+              <a:t>5/9/2026</a:t>
             </a:fld>
             <a:endParaRPr lang="en-US"/>
           </a:p>
@@ -382,10 +396,9 @@
           <a:lstStyle/>
           <a:p>
             <a:r>
-              <a:rPr lang="en-US" smtClean="0"/>
+              <a:rPr lang="en-US"/>
               <a:t>Click to edit Master title style</a:t>
             </a:r>
-            <a:endParaRPr lang="en-US"/>
           </a:p>
         </p:txBody>
       </p:sp>
@@ -406,38 +419,37 @@
           <a:p>
             <a:pPr lvl="0"/>
             <a:r>
-              <a:rPr lang="en-US" smtClean="0"/>
+              <a:rPr lang="en-US"/>
               <a:t>Click to edit Master text styles</a:t>
             </a:r>
           </a:p>
           <a:p>
             <a:pPr lvl="1"/>
             <a:r>
-              <a:rPr lang="en-US" smtClean="0"/>
+              <a:rPr lang="en-US"/>
               <a:t>Second level</a:t>
             </a:r>
           </a:p>
           <a:p>
             <a:pPr lvl="2"/>
             <a:r>
-              <a:rPr lang="en-US" smtClean="0"/>
+              <a:rPr lang="en-US"/>
               <a:t>Third level</a:t>
             </a:r>
           </a:p>
           <a:p>
             <a:pPr lvl="3"/>
             <a:r>
-              <a:rPr lang="en-US" smtClean="0"/>
+              <a:rPr lang="en-US"/>
               <a:t>Fourth level</a:t>
             </a:r>
           </a:p>
           <a:p>
             <a:pPr lvl="4"/>
             <a:r>
-              <a:rPr lang="en-US" smtClean="0"/>
+              <a:rPr lang="en-US"/>
               <a:t>Fifth level</a:t>
             </a:r>
-            <a:endParaRPr lang="en-US"/>
           </a:p>
         </p:txBody>
       </p:sp>
@@ -458,7 +470,7 @@
           <a:p>
             <a:fld id="{5BCAD085-E8A6-8845-BD4E-CB4CCA059FC4}" type="datetimeFigureOut">
               <a:rPr lang="en-US" smtClean="0"/>
-              <a:t>1/27/13</a:t>
+              <a:t>5/9/2026</a:t>
             </a:fld>
             <a:endParaRPr lang="en-US"/>
           </a:p>
@@ -557,10 +569,9 @@
           <a:lstStyle/>
           <a:p>
             <a:r>
-              <a:rPr lang="en-US" smtClean="0"/>
+              <a:rPr lang="en-US"/>
               <a:t>Click to edit Master title style</a:t>
             </a:r>
-            <a:endParaRPr lang="en-US"/>
           </a:p>
         </p:txBody>
       </p:sp>
@@ -586,38 +597,37 @@
           <a:p>
             <a:pPr lvl="0"/>
             <a:r>
-              <a:rPr lang="en-US" smtClean="0"/>
+              <a:rPr lang="en-US"/>
               <a:t>Click to edit Master text styles</a:t>
             </a:r>
           </a:p>
           <a:p>
             <a:pPr lvl="1"/>
             <a:r>
-              <a:rPr lang="en-US" smtClean="0"/>
+              <a:rPr lang="en-US"/>
               <a:t>Second level</a:t>
             </a:r>
           </a:p>
           <a:p>
             <a:pPr lvl="2"/>
             <a:r>
-              <a:rPr lang="en-US" smtClean="0"/>
+              <a:rPr lang="en-US"/>
               <a:t>Third level</a:t>
             </a:r>
           </a:p>
           <a:p>
             <a:pPr lvl="3"/>
             <a:r>
-              <a:rPr lang="en-US" smtClean="0"/>
+              <a:rPr lang="en-US"/>
               <a:t>Fourth level</a:t>
             </a:r>
           </a:p>
           <a:p>
             <a:pPr lvl="4"/>
             <a:r>
-              <a:rPr lang="en-US" smtClean="0"/>
+              <a:rPr lang="en-US"/>
               <a:t>Fifth level</a:t>
             </a:r>
-            <a:endParaRPr lang="en-US"/>
           </a:p>
         </p:txBody>
       </p:sp>
@@ -638,7 +648,7 @@
           <a:p>
             <a:fld id="{5BCAD085-E8A6-8845-BD4E-CB4CCA059FC4}" type="datetimeFigureOut">
               <a:rPr lang="en-US" smtClean="0"/>
-              <a:t>1/27/13</a:t>
+              <a:t>5/9/2026</a:t>
             </a:fld>
             <a:endParaRPr lang="en-US"/>
           </a:p>
@@ -732,10 +742,9 @@
           <a:lstStyle/>
           <a:p>
             <a:r>
-              <a:rPr lang="en-US" smtClean="0"/>
+              <a:rPr lang="en-US"/>
               <a:t>Click to edit Master title style</a:t>
             </a:r>
-            <a:endParaRPr lang="en-US"/>
           </a:p>
         </p:txBody>
       </p:sp>
@@ -756,38 +765,37 @@
           <a:p>
             <a:pPr lvl="0"/>
             <a:r>
-              <a:rPr lang="en-US" smtClean="0"/>
+              <a:rPr lang="en-US"/>
               <a:t>Click to edit Master text styles</a:t>
             </a:r>
           </a:p>
           <a:p>
             <a:pPr lvl="1"/>
             <a:r>
-              <a:rPr lang="en-US" smtClean="0"/>
+              <a:rPr lang="en-US"/>
               <a:t>Second level</a:t>
             </a:r>
           </a:p>
           <a:p>
             <a:pPr lvl="2"/>
             <a:r>
-              <a:rPr lang="en-US" smtClean="0"/>
+              <a:rPr lang="en-US"/>
               <a:t>Third level</a:t>
             </a:r>
           </a:p>
           <a:p>
             <a:pPr lvl="3"/>
             <a:r>
-              <a:rPr lang="en-US" smtClean="0"/>
+              <a:rPr lang="en-US"/>
               <a:t>Fourth level</a:t>
             </a:r>
           </a:p>
           <a:p>
             <a:pPr lvl="4"/>
             <a:r>
-              <a:rPr lang="en-US" smtClean="0"/>
+              <a:rPr lang="en-US"/>
               <a:t>Fifth level</a:t>
             </a:r>
-            <a:endParaRPr lang="en-US"/>
           </a:p>
         </p:txBody>
       </p:sp>
@@ -808,7 +816,7 @@
           <a:p>
             <a:fld id="{5BCAD085-E8A6-8845-BD4E-CB4CCA059FC4}" type="datetimeFigureOut">
               <a:rPr lang="en-US" smtClean="0"/>
-              <a:t>1/27/13</a:t>
+              <a:t>5/9/2026</a:t>
             </a:fld>
             <a:endParaRPr lang="en-US"/>
           </a:p>
@@ -911,10 +919,9 @@
           </a:lstStyle>
           <a:p>
             <a:r>
-              <a:rPr lang="en-US" smtClean="0"/>
+              <a:rPr lang="en-US"/>
               <a:t>Click to edit Master title style</a:t>
             </a:r>
-            <a:endParaRPr lang="en-US"/>
           </a:p>
         </p:txBody>
       </p:sp>
@@ -1031,7 +1038,7 @@
           <a:p>
             <a:pPr lvl="0"/>
             <a:r>
-              <a:rPr lang="en-US" smtClean="0"/>
+              <a:rPr lang="en-US"/>
               <a:t>Click to edit Master text styles</a:t>
             </a:r>
           </a:p>
@@ -1054,7 +1061,7 @@
           <a:p>
             <a:fld id="{5BCAD085-E8A6-8845-BD4E-CB4CCA059FC4}" type="datetimeFigureOut">
               <a:rPr lang="en-US" smtClean="0"/>
-              <a:t>1/27/13</a:t>
+              <a:t>5/9/2026</a:t>
             </a:fld>
             <a:endParaRPr lang="en-US"/>
           </a:p>
@@ -1148,10 +1155,9 @@
           <a:lstStyle/>
           <a:p>
             <a:r>
-              <a:rPr lang="en-US" smtClean="0"/>
+              <a:rPr lang="en-US"/>
               <a:t>Click to edit Master title style</a:t>
             </a:r>
-            <a:endParaRPr lang="en-US"/>
           </a:p>
         </p:txBody>
       </p:sp>
@@ -1205,38 +1211,37 @@
           <a:p>
             <a:pPr lvl="0"/>
             <a:r>
-              <a:rPr lang="en-US" smtClean="0"/>
+              <a:rPr lang="en-US"/>
               <a:t>Click to edit Master text styles</a:t>
             </a:r>
           </a:p>
           <a:p>
             <a:pPr lvl="1"/>
             <a:r>
-              <a:rPr lang="en-US" smtClean="0"/>
+              <a:rPr lang="en-US"/>
               <a:t>Second level</a:t>
             </a:r>
           </a:p>
           <a:p>
             <a:pPr lvl="2"/>
             <a:r>
-              <a:rPr lang="en-US" smtClean="0"/>
+              <a:rPr lang="en-US"/>
               <a:t>Third level</a:t>
             </a:r>
           </a:p>
           <a:p>
             <a:pPr lvl="3"/>
             <a:r>
-              <a:rPr lang="en-US" smtClean="0"/>
+              <a:rPr lang="en-US"/>
               <a:t>Fourth level</a:t>
             </a:r>
           </a:p>
           <a:p>
             <a:pPr lvl="4"/>
             <a:r>
-              <a:rPr lang="en-US" smtClean="0"/>
+              <a:rPr lang="en-US"/>
               <a:t>Fifth level</a:t>
             </a:r>
-            <a:endParaRPr lang="en-US"/>
           </a:p>
         </p:txBody>
       </p:sp>
@@ -1290,38 +1295,37 @@
           <a:p>
             <a:pPr lvl="0"/>
             <a:r>
-              <a:rPr lang="en-US" smtClean="0"/>
+              <a:rPr lang="en-US"/>
               <a:t>Click to edit Master text styles</a:t>
             </a:r>
           </a:p>
           <a:p>
             <a:pPr lvl="1"/>
             <a:r>
-              <a:rPr lang="en-US" smtClean="0"/>
+              <a:rPr lang="en-US"/>
               <a:t>Second level</a:t>
             </a:r>
           </a:p>
           <a:p>
             <a:pPr lvl="2"/>
             <a:r>
-              <a:rPr lang="en-US" smtClean="0"/>
+              <a:rPr lang="en-US"/>
               <a:t>Third level</a:t>
             </a:r>
           </a:p>
           <a:p>
             <a:pPr lvl="3"/>
             <a:r>
-              <a:rPr lang="en-US" smtClean="0"/>
+              <a:rPr lang="en-US"/>
               <a:t>Fourth level</a:t>
             </a:r>
           </a:p>
           <a:p>
             <a:pPr lvl="4"/>
             <a:r>
-              <a:rPr lang="en-US" smtClean="0"/>
+              <a:rPr lang="en-US"/>
               <a:t>Fifth level</a:t>
             </a:r>
-            <a:endParaRPr lang="en-US"/>
           </a:p>
         </p:txBody>
       </p:sp>
@@ -1342,7 +1346,7 @@
           <a:p>
             <a:fld id="{5BCAD085-E8A6-8845-BD4E-CB4CCA059FC4}" type="datetimeFigureOut">
               <a:rPr lang="en-US" smtClean="0"/>
-              <a:t>1/27/13</a:t>
+              <a:t>5/9/2026</a:t>
             </a:fld>
             <a:endParaRPr lang="en-US"/>
           </a:p>
@@ -1440,10 +1444,9 @@
           </a:lstStyle>
           <a:p>
             <a:r>
-              <a:rPr lang="en-US" smtClean="0"/>
+              <a:rPr lang="en-US"/>
               <a:t>Click to edit Master title style</a:t>
             </a:r>
-            <a:endParaRPr lang="en-US"/>
           </a:p>
         </p:txBody>
       </p:sp>
@@ -1506,7 +1509,7 @@
           <a:p>
             <a:pPr lvl="0"/>
             <a:r>
-              <a:rPr lang="en-US" smtClean="0"/>
+              <a:rPr lang="en-US"/>
               <a:t>Click to edit Master text styles</a:t>
             </a:r>
           </a:p>
@@ -1562,38 +1565,37 @@
           <a:p>
             <a:pPr lvl="0"/>
             <a:r>
-              <a:rPr lang="en-US" smtClean="0"/>
+              <a:rPr lang="en-US"/>
               <a:t>Click to edit Master text styles</a:t>
             </a:r>
           </a:p>
           <a:p>
             <a:pPr lvl="1"/>
             <a:r>
-              <a:rPr lang="en-US" smtClean="0"/>
+              <a:rPr lang="en-US"/>
               <a:t>Second level</a:t>
             </a:r>
           </a:p>
           <a:p>
             <a:pPr lvl="2"/>
             <a:r>
-              <a:rPr lang="en-US" smtClean="0"/>
+              <a:rPr lang="en-US"/>
               <a:t>Third level</a:t>
             </a:r>
           </a:p>
           <a:p>
             <a:pPr lvl="3"/>
             <a:r>
-              <a:rPr lang="en-US" smtClean="0"/>
+              <a:rPr lang="en-US"/>
               <a:t>Fourth level</a:t>
             </a:r>
           </a:p>
           <a:p>
             <a:pPr lvl="4"/>
             <a:r>
-              <a:rPr lang="en-US" smtClean="0"/>
+              <a:rPr lang="en-US"/>
               <a:t>Fifth level</a:t>
             </a:r>
-            <a:endParaRPr lang="en-US"/>
           </a:p>
         </p:txBody>
       </p:sp>
@@ -1656,7 +1658,7 @@
           <a:p>
             <a:pPr lvl="0"/>
             <a:r>
-              <a:rPr lang="en-US" smtClean="0"/>
+              <a:rPr lang="en-US"/>
               <a:t>Click to edit Master text styles</a:t>
             </a:r>
           </a:p>
@@ -1712,38 +1714,37 @@
           <a:p>
             <a:pPr lvl="0"/>
             <a:r>
-              <a:rPr lang="en-US" smtClean="0"/>
+              <a:rPr lang="en-US"/>
               <a:t>Click to edit Master text styles</a:t>
             </a:r>
           </a:p>
           <a:p>
             <a:pPr lvl="1"/>
             <a:r>
-              <a:rPr lang="en-US" smtClean="0"/>
+              <a:rPr lang="en-US"/>
               <a:t>Second level</a:t>
             </a:r>
           </a:p>
           <a:p>
             <a:pPr lvl="2"/>
             <a:r>
-              <a:rPr lang="en-US" smtClean="0"/>
+              <a:rPr lang="en-US"/>
               <a:t>Third level</a:t>
             </a:r>
           </a:p>
           <a:p>
             <a:pPr lvl="3"/>
             <a:r>
-              <a:rPr lang="en-US" smtClean="0"/>
+              <a:rPr lang="en-US"/>
               <a:t>Fourth level</a:t>
             </a:r>
           </a:p>
           <a:p>
             <a:pPr lvl="4"/>
             <a:r>
-              <a:rPr lang="en-US" smtClean="0"/>
+              <a:rPr lang="en-US"/>
               <a:t>Fifth level</a:t>
             </a:r>
-            <a:endParaRPr lang="en-US"/>
           </a:p>
         </p:txBody>
       </p:sp>
@@ -1764,7 +1765,7 @@
           <a:p>
             <a:fld id="{5BCAD085-E8A6-8845-BD4E-CB4CCA059FC4}" type="datetimeFigureOut">
               <a:rPr lang="en-US" smtClean="0"/>
-              <a:t>1/27/13</a:t>
+              <a:t>5/9/2026</a:t>
             </a:fld>
             <a:endParaRPr lang="en-US"/>
           </a:p>
@@ -1858,10 +1859,9 @@
           <a:lstStyle/>
           <a:p>
             <a:r>
-              <a:rPr lang="en-US" smtClean="0"/>
+              <a:rPr lang="en-US"/>
               <a:t>Click to edit Master title style</a:t>
             </a:r>
-            <a:endParaRPr lang="en-US"/>
           </a:p>
         </p:txBody>
       </p:sp>
@@ -1882,7 +1882,7 @@
           <a:p>
             <a:fld id="{5BCAD085-E8A6-8845-BD4E-CB4CCA059FC4}" type="datetimeFigureOut">
               <a:rPr lang="en-US" smtClean="0"/>
-              <a:t>1/27/13</a:t>
+              <a:t>5/9/2026</a:t>
             </a:fld>
             <a:endParaRPr lang="en-US"/>
           </a:p>
@@ -1977,7 +1977,7 @@
           <a:p>
             <a:fld id="{5BCAD085-E8A6-8845-BD4E-CB4CCA059FC4}" type="datetimeFigureOut">
               <a:rPr lang="en-US" smtClean="0"/>
-              <a:t>1/27/13</a:t>
+              <a:t>5/9/2026</a:t>
             </a:fld>
             <a:endParaRPr lang="en-US"/>
           </a:p>
@@ -2080,10 +2080,9 @@
           </a:lstStyle>
           <a:p>
             <a:r>
-              <a:rPr lang="en-US" smtClean="0"/>
+              <a:rPr lang="en-US"/>
               <a:t>Click to edit Master title style</a:t>
             </a:r>
-            <a:endParaRPr lang="en-US"/>
           </a:p>
         </p:txBody>
       </p:sp>
@@ -2137,38 +2136,37 @@
           <a:p>
             <a:pPr lvl="0"/>
             <a:r>
-              <a:rPr lang="en-US" smtClean="0"/>
+              <a:rPr lang="en-US"/>
               <a:t>Click to edit Master text styles</a:t>
             </a:r>
           </a:p>
           <a:p>
             <a:pPr lvl="1"/>
             <a:r>
-              <a:rPr lang="en-US" smtClean="0"/>
+              <a:rPr lang="en-US"/>
               <a:t>Second level</a:t>
             </a:r>
           </a:p>
           <a:p>
             <a:pPr lvl="2"/>
             <a:r>
-              <a:rPr lang="en-US" smtClean="0"/>
+              <a:rPr lang="en-US"/>
               <a:t>Third level</a:t>
             </a:r>
           </a:p>
           <a:p>
             <a:pPr lvl="3"/>
             <a:r>
-              <a:rPr lang="en-US" smtClean="0"/>
+              <a:rPr lang="en-US"/>
               <a:t>Fourth level</a:t>
             </a:r>
           </a:p>
           <a:p>
             <a:pPr lvl="4"/>
             <a:r>
-              <a:rPr lang="en-US" smtClean="0"/>
+              <a:rPr lang="en-US"/>
               <a:t>Fifth level</a:t>
             </a:r>
-            <a:endParaRPr lang="en-US"/>
           </a:p>
         </p:txBody>
       </p:sp>
@@ -2231,7 +2229,7 @@
           <a:p>
             <a:pPr lvl="0"/>
             <a:r>
-              <a:rPr lang="en-US" smtClean="0"/>
+              <a:rPr lang="en-US"/>
               <a:t>Click to edit Master text styles</a:t>
             </a:r>
           </a:p>
@@ -2254,7 +2252,7 @@
           <a:p>
             <a:fld id="{5BCAD085-E8A6-8845-BD4E-CB4CCA059FC4}" type="datetimeFigureOut">
               <a:rPr lang="en-US" smtClean="0"/>
-              <a:t>1/27/13</a:t>
+              <a:t>5/9/2026</a:t>
             </a:fld>
             <a:endParaRPr lang="en-US"/>
           </a:p>
@@ -2357,10 +2355,9 @@
           </a:lstStyle>
           <a:p>
             <a:r>
-              <a:rPr lang="en-US" smtClean="0"/>
+              <a:rPr lang="en-US"/>
               <a:t>Click to edit Master title style</a:t>
             </a:r>
-            <a:endParaRPr lang="en-US"/>
           </a:p>
         </p:txBody>
       </p:sp>
@@ -2484,7 +2481,7 @@
           <a:p>
             <a:pPr lvl="0"/>
             <a:r>
-              <a:rPr lang="en-US" smtClean="0"/>
+              <a:rPr lang="en-US"/>
               <a:t>Click to edit Master text styles</a:t>
             </a:r>
           </a:p>
@@ -2507,7 +2504,7 @@
           <a:p>
             <a:fld id="{5BCAD085-E8A6-8845-BD4E-CB4CCA059FC4}" type="datetimeFigureOut">
               <a:rPr lang="en-US" smtClean="0"/>
-              <a:t>1/27/13</a:t>
+              <a:t>5/9/2026</a:t>
             </a:fld>
             <a:endParaRPr lang="en-US"/>
           </a:p>
@@ -2616,10 +2613,9 @@
           <a:lstStyle/>
           <a:p>
             <a:r>
-              <a:rPr lang="en-US" smtClean="0"/>
+              <a:rPr lang="en-US"/>
               <a:t>Click to edit Master title style</a:t>
             </a:r>
-            <a:endParaRPr lang="en-US"/>
           </a:p>
         </p:txBody>
       </p:sp>
@@ -2650,38 +2646,37 @@
           <a:p>
             <a:pPr lvl="0"/>
             <a:r>
-              <a:rPr lang="en-US" smtClean="0"/>
+              <a:rPr lang="en-US"/>
               <a:t>Click to edit Master text styles</a:t>
             </a:r>
           </a:p>
           <a:p>
             <a:pPr lvl="1"/>
             <a:r>
-              <a:rPr lang="en-US" smtClean="0"/>
+              <a:rPr lang="en-US"/>
               <a:t>Second level</a:t>
             </a:r>
           </a:p>
           <a:p>
             <a:pPr lvl="2"/>
             <a:r>
-              <a:rPr lang="en-US" smtClean="0"/>
+              <a:rPr lang="en-US"/>
               <a:t>Third level</a:t>
             </a:r>
           </a:p>
           <a:p>
             <a:pPr lvl="3"/>
             <a:r>
-              <a:rPr lang="en-US" smtClean="0"/>
+              <a:rPr lang="en-US"/>
               <a:t>Fourth level</a:t>
             </a:r>
           </a:p>
           <a:p>
             <a:pPr lvl="4"/>
             <a:r>
-              <a:rPr lang="en-US" smtClean="0"/>
+              <a:rPr lang="en-US"/>
               <a:t>Fifth level</a:t>
             </a:r>
-            <a:endParaRPr lang="en-US"/>
           </a:p>
         </p:txBody>
       </p:sp>
@@ -2720,7 +2715,7 @@
           <a:p>
             <a:fld id="{5BCAD085-E8A6-8845-BD4E-CB4CCA059FC4}" type="datetimeFigureOut">
               <a:rPr lang="en-US" smtClean="0"/>
-              <a:t>1/27/13</a:t>
+              <a:t>5/9/2026</a:t>
             </a:fld>
             <a:endParaRPr lang="en-US"/>
           </a:p>
@@ -3079,7 +3074,7 @@
 </file>
 
 <file path=ppt/slides/slide1.xml><?xml version="1.0" encoding="utf-8"?>
-<p:sld xmlns:a="http://schemas.openxmlformats.org/drawingml/2006/main" xmlns:p="http://schemas.openxmlformats.org/presentationml/2006/main" xmlns:r="http://schemas.openxmlformats.org/officeDocument/2006/relationships">
+<p:sld xmlns:a="http://schemas.openxmlformats.org/drawingml/2006/main" xmlns:r="http://schemas.openxmlformats.org/officeDocument/2006/relationships" xmlns:p="http://schemas.openxmlformats.org/presentationml/2006/main">
   <p:cSld>
     <p:spTree>
       <p:nvGrpSpPr>
@@ -3087,17 +3082,172 @@
         <p:cNvGrpSpPr/>
         <p:nvPr/>
       </p:nvGrpSpPr>
-      <p:grpSpPr/>
-      <p:sp>
-        <p:nvSpPr>
-          <p:cNvPr id="2" name="TextBox 1"/>
+      <p:grpSpPr>
+        <a:xfrm>
+          <a:off x="0" y="0"/>
+          <a:ext cx="0" cy="0"/>
+          <a:chOff x="0" y="0"/>
+          <a:chExt cx="0" cy="0"/>
+        </a:xfrm>
+      </p:grpSpPr>
+      <p:sp>
+        <p:nvSpPr>
+          <p:cNvPr id="3" name="Rounded Rectangle 2"/>
+          <p:cNvSpPr/>
+          <p:nvPr/>
+        </p:nvSpPr>
+        <p:spPr>
+          <a:xfrm>
+            <a:off x="741505" y="929115"/>
+            <a:ext cx="4114800" cy="2011680"/>
+          </a:xfrm>
+          <a:prstGeom prst="roundRect">
+            <a:avLst/>
+          </a:prstGeom>
+          <a:solidFill>
+            <a:srgbClr val="E8F5E9"/>
+          </a:solidFill>
+          <a:ln w="19050">
+            <a:solidFill>
+              <a:srgbClr val="2E7D32"/>
+            </a:solidFill>
+          </a:ln>
+        </p:spPr>
+        <p:style>
+          <a:lnRef idx="1">
+            <a:schemeClr val="accent1"/>
+          </a:lnRef>
+          <a:fillRef idx="3">
+            <a:schemeClr val="accent1"/>
+          </a:fillRef>
+          <a:effectRef idx="2">
+            <a:schemeClr val="accent1"/>
+          </a:effectRef>
+          <a:fontRef idx="minor">
+            <a:schemeClr val="lt1"/>
+          </a:fontRef>
+        </p:style>
+        <p:txBody>
+          <a:bodyPr wrap="square" tIns="50800" bIns="50800" rtlCol="0" anchor="ctr"/>
+          <a:lstStyle/>
+          <a:p>
+            <a:pPr algn="ctr">
+              <a:spcBef>
+                <a:spcPts val="0"/>
+              </a:spcBef>
+              <a:spcAft>
+                <a:spcPts val="0"/>
+              </a:spcAft>
+            </a:pPr>
+            <a:r>
+              <a:rPr sz="1600" b="0" dirty="0">
+                <a:solidFill>
+                  <a:srgbClr val="1B5E20"/>
+                </a:solidFill>
+              </a:rPr>
+              <a:t>CLINICAL PRACTICE
+GUIDELINES</a:t>
+            </a:r>
+            <a:r>
+              <a:rPr sz="1100" b="0" dirty="0">
+                <a:solidFill>
+                  <a:srgbClr val="1B5E20"/>
+                </a:solidFill>
+              </a:rPr>
+              <a:t>
+GINA (Asthma)
+ADA (Diabetes)
+Endocrine Society
+ESC (Cardiology)
+NICE (ADHD)</a:t>
+            </a:r>
+          </a:p>
+        </p:txBody>
+      </p:sp>
+      <p:sp>
+        <p:nvSpPr>
+          <p:cNvPr id="4" name="Rounded Rectangle 3"/>
+          <p:cNvSpPr/>
+          <p:nvPr/>
+        </p:nvSpPr>
+        <p:spPr>
+          <a:xfrm>
+            <a:off x="7325185" y="929115"/>
+            <a:ext cx="4114800" cy="2011680"/>
+          </a:xfrm>
+          <a:prstGeom prst="roundRect">
+            <a:avLst/>
+          </a:prstGeom>
+          <a:solidFill>
+            <a:srgbClr val="E3F2FD"/>
+          </a:solidFill>
+          <a:ln w="19050">
+            <a:solidFill>
+              <a:srgbClr val="1565C0"/>
+            </a:solidFill>
+          </a:ln>
+        </p:spPr>
+        <p:style>
+          <a:lnRef idx="1">
+            <a:schemeClr val="accent1"/>
+          </a:lnRef>
+          <a:fillRef idx="3">
+            <a:schemeClr val="accent1"/>
+          </a:fillRef>
+          <a:effectRef idx="2">
+            <a:schemeClr val="accent1"/>
+          </a:effectRef>
+          <a:fontRef idx="minor">
+            <a:schemeClr val="lt1"/>
+          </a:fontRef>
+        </p:style>
+        <p:txBody>
+          <a:bodyPr wrap="square" tIns="50800" bIns="50800" rtlCol="0" anchor="ctr"/>
+          <a:lstStyle/>
+          <a:p>
+            <a:pPr algn="ctr">
+              <a:spcBef>
+                <a:spcPts val="0"/>
+              </a:spcBef>
+              <a:spcAft>
+                <a:spcPts val="0"/>
+              </a:spcAft>
+            </a:pPr>
+            <a:r>
+              <a:rPr sz="1600" b="0" dirty="0">
+                <a:solidFill>
+                  <a:srgbClr val="0D47A1"/>
+                </a:solidFill>
+              </a:rPr>
+              <a:t>WADA ANTI-DOPING
+REGULATIONS</a:t>
+            </a:r>
+            <a:r>
+              <a:rPr sz="1100" b="0" dirty="0">
+                <a:solidFill>
+                  <a:srgbClr val="0D47A1"/>
+                </a:solidFill>
+              </a:rPr>
+              <a:t>
+Prohibited List
+ISTUE Standards
+TUE Physician Guidelines
+Monitoring Program
+ADAMS System</a:t>
+            </a:r>
+          </a:p>
+        </p:txBody>
+      </p:sp>
+      <p:sp>
+        <p:nvSpPr>
+          <p:cNvPr id="5" name="TextBox 4"/>
           <p:cNvSpPr txBox="1"/>
           <p:nvPr/>
         </p:nvSpPr>
         <p:spPr>
           <a:xfrm>
-            <a:off x="457200" y="182880"/>
-            <a:ext cx="11247120" cy="548640"/>
+            <a:off x="970104" y="3033549"/>
+            <a:ext cx="1828800" cy="365760"/>
           </a:xfrm>
           <a:prstGeom prst="rect">
             <a:avLst/>
@@ -3105,53 +3255,34 @@
           <a:noFill/>
         </p:spPr>
         <p:txBody>
-          <a:bodyPr wrap="square">
+          <a:bodyPr wrap="none">
             <a:spAutoFit/>
           </a:bodyPr>
           <a:lstStyle/>
           <a:p>
             <a:pPr algn="ctr"/>
             <a:r>
-              <a:rPr b="1" sz="2400"/>
-              <a:t>Figure 4</a:t>
-            </a:r>
-          </a:p>
-        </p:txBody>
-      </p:sp>
-      <p:pic>
-        <p:nvPicPr>
-          <p:cNvPr id="3" name="Picture 2" descr="fig4_conceptual_framework.png"/>
-          <p:cNvPicPr>
-            <a:picLocks noChangeAspect="1"/>
-          </p:cNvPicPr>
+              <a:rPr sz="800" i="1" dirty="0">
+                <a:solidFill>
+                  <a:srgbClr val="2E7D32"/>
+                </a:solidFill>
+              </a:rPr>
+              <a:t>Evidence-based
+recommendations</a:t>
+            </a:r>
+          </a:p>
+        </p:txBody>
+      </p:sp>
+      <p:sp>
+        <p:nvSpPr>
+          <p:cNvPr id="6" name="TextBox 5"/>
+          <p:cNvSpPr txBox="1"/>
           <p:nvPr/>
-        </p:nvPicPr>
-        <p:blipFill>
-          <a:blip r:embed="rId2"/>
-          <a:stretch>
-            <a:fillRect/>
-          </a:stretch>
-        </p:blipFill>
+        </p:nvSpPr>
         <p:spPr>
           <a:xfrm>
-            <a:off x="3227482" y="914400"/>
-            <a:ext cx="5736730" cy="4572000"/>
-          </a:xfrm>
-          <a:prstGeom prst="rect">
-            <a:avLst/>
-          </a:prstGeom>
-        </p:spPr>
-      </p:pic>
-      <p:sp>
-        <p:nvSpPr>
-          <p:cNvPr id="4" name="TextBox 3"/>
-          <p:cNvSpPr txBox="1"/>
-          <p:nvPr/>
-        </p:nvSpPr>
-        <p:spPr>
-          <a:xfrm>
-            <a:off x="457200" y="5943600"/>
-            <a:ext cx="11247120" cy="731520"/>
+            <a:off x="9338967" y="3036702"/>
+            <a:ext cx="1828800" cy="365760"/>
           </a:xfrm>
           <a:prstGeom prst="rect">
             <a:avLst/>
@@ -3159,19 +3290,381 @@
           <a:noFill/>
         </p:spPr>
         <p:txBody>
-          <a:bodyPr wrap="square">
+          <a:bodyPr wrap="none">
             <a:spAutoFit/>
           </a:bodyPr>
           <a:lstStyle/>
           <a:p>
             <a:pPr algn="ctr"/>
             <a:r>
-              <a:rPr sz="1400" i="1"/>
-              <a:t>Figure 4. Conceptual framework: structural drivers of clinical-competition divergence.</a:t>
-            </a:r>
-          </a:p>
-        </p:txBody>
-      </p:sp>
+              <a:rPr sz="800" i="1">
+                <a:solidFill>
+                  <a:srgbClr val="1565C0"/>
+                </a:solidFill>
+              </a:rPr>
+              <a:t>Regulatory
+restrictions</a:t>
+            </a:r>
+          </a:p>
+        </p:txBody>
+      </p:sp>
+      <p:sp>
+        <p:nvSpPr>
+          <p:cNvPr id="7" name="Rounded Rectangle 6"/>
+          <p:cNvSpPr/>
+          <p:nvPr/>
+        </p:nvSpPr>
+        <p:spPr>
+          <a:xfrm>
+            <a:off x="3667585" y="3260835"/>
+            <a:ext cx="4846320" cy="1371600"/>
+          </a:xfrm>
+          <a:prstGeom prst="roundRect">
+            <a:avLst/>
+          </a:prstGeom>
+          <a:solidFill>
+            <a:srgbClr val="FFEBEE"/>
+          </a:solidFill>
+          <a:ln w="19050">
+            <a:solidFill>
+              <a:srgbClr val="C62828"/>
+            </a:solidFill>
+          </a:ln>
+        </p:spPr>
+        <p:style>
+          <a:lnRef idx="1">
+            <a:schemeClr val="accent1"/>
+          </a:lnRef>
+          <a:fillRef idx="3">
+            <a:schemeClr val="accent1"/>
+          </a:fillRef>
+          <a:effectRef idx="2">
+            <a:schemeClr val="accent1"/>
+          </a:effectRef>
+          <a:fontRef idx="minor">
+            <a:schemeClr val="lt1"/>
+          </a:fontRef>
+        </p:style>
+        <p:txBody>
+          <a:bodyPr wrap="square" tIns="50800" bIns="50800" rtlCol="0" anchor="ctr"/>
+          <a:lstStyle/>
+          <a:p>
+            <a:pPr algn="ctr">
+              <a:spcBef>
+                <a:spcPts val="0"/>
+              </a:spcBef>
+              <a:spcAft>
+                <a:spcPts val="0"/>
+              </a:spcAft>
+            </a:pPr>
+            <a:r>
+              <a:rPr sz="1600" b="1" dirty="0">
+                <a:solidFill>
+                  <a:srgbClr val="B71C1C"/>
+                </a:solidFill>
+              </a:rPr>
+              <a:t>CLINICAL-COMPETITION GAP</a:t>
+            </a:r>
+            <a:r>
+              <a:rPr sz="1200" b="1" dirty="0">
+                <a:solidFill>
+                  <a:srgbClr val="B71C1C"/>
+                </a:solidFill>
+              </a:rPr>
+              <a:t>
+Update timing lag | Divergent criteria
+Prohibited first-line Rx | TUE process barriers</a:t>
+            </a:r>
+          </a:p>
+        </p:txBody>
+      </p:sp>
+      <p:sp>
+        <p:nvSpPr>
+          <p:cNvPr id="8" name="Rounded Rectangle 7"/>
+          <p:cNvSpPr/>
+          <p:nvPr/>
+        </p:nvSpPr>
+        <p:spPr>
+          <a:xfrm>
+            <a:off x="2301240" y="4929615"/>
+            <a:ext cx="7589520" cy="1097280"/>
+          </a:xfrm>
+          <a:prstGeom prst="roundRect">
+            <a:avLst/>
+          </a:prstGeom>
+          <a:solidFill>
+            <a:srgbClr val="FFF3E0"/>
+          </a:solidFill>
+          <a:ln w="19050">
+            <a:solidFill>
+              <a:srgbClr val="E65100"/>
+            </a:solidFill>
+          </a:ln>
+        </p:spPr>
+        <p:style>
+          <a:lnRef idx="1">
+            <a:schemeClr val="accent1"/>
+          </a:lnRef>
+          <a:fillRef idx="3">
+            <a:schemeClr val="accent1"/>
+          </a:fillRef>
+          <a:effectRef idx="2">
+            <a:schemeClr val="accent1"/>
+          </a:effectRef>
+          <a:fontRef idx="minor">
+            <a:schemeClr val="lt1"/>
+          </a:fontRef>
+        </p:style>
+        <p:txBody>
+          <a:bodyPr wrap="square" tIns="50800" bIns="50800" rtlCol="0" anchor="ctr"/>
+          <a:lstStyle/>
+          <a:p>
+            <a:pPr algn="ctr">
+              <a:spcBef>
+                <a:spcPts val="0"/>
+              </a:spcBef>
+              <a:spcAft>
+                <a:spcPts val="0"/>
+              </a:spcAft>
+            </a:pPr>
+            <a:r>
+              <a:rPr sz="1000" b="0" dirty="0">
+                <a:solidFill>
+                  <a:srgbClr val="BF360C"/>
+                </a:solidFill>
+              </a:rPr>
+              <a:t>IMPACT ON ATHLETES
+Suboptimal treatment | Delayed care access | ADRV risk
+Privacy concerns | Geographic disparities | Career impact</a:t>
+            </a:r>
+          </a:p>
+        </p:txBody>
+      </p:sp>
+      <p:sp>
+        <p:nvSpPr>
+          <p:cNvPr id="9" name="Rounded Rectangle 8"/>
+          <p:cNvSpPr/>
+          <p:nvPr/>
+        </p:nvSpPr>
+        <p:spPr>
+          <a:xfrm>
+            <a:off x="2295985" y="6324075"/>
+            <a:ext cx="7589520" cy="320040"/>
+          </a:xfrm>
+          <a:prstGeom prst="roundRect">
+            <a:avLst/>
+          </a:prstGeom>
+          <a:solidFill>
+            <a:srgbClr val="E0E0E0"/>
+          </a:solidFill>
+          <a:ln w="19050">
+            <a:solidFill>
+              <a:srgbClr val="757575"/>
+            </a:solidFill>
+          </a:ln>
+        </p:spPr>
+        <p:style>
+          <a:lnRef idx="1">
+            <a:schemeClr val="accent1"/>
+          </a:lnRef>
+          <a:fillRef idx="3">
+            <a:schemeClr val="accent1"/>
+          </a:fillRef>
+          <a:effectRef idx="2">
+            <a:schemeClr val="accent1"/>
+          </a:effectRef>
+          <a:fontRef idx="minor">
+            <a:schemeClr val="lt1"/>
+          </a:fontRef>
+        </p:style>
+        <p:txBody>
+          <a:bodyPr wrap="square" tIns="50800" bIns="50800" rtlCol="0" anchor="ctr"/>
+          <a:lstStyle/>
+          <a:p>
+            <a:pPr algn="ctr">
+              <a:spcBef>
+                <a:spcPts val="0"/>
+              </a:spcBef>
+              <a:spcAft>
+                <a:spcPts val="0"/>
+              </a:spcAft>
+            </a:pPr>
+            <a:r>
+              <a:rPr sz="900" b="1">
+                <a:solidFill>
+                  <a:srgbClr val="424242"/>
+                </a:solidFill>
+              </a:rPr>
+              <a:t>RECOMMENDATIONS: Harmonize updates | Streamline TUE | Educate clinicians</a:t>
+            </a:r>
+          </a:p>
+        </p:txBody>
+      </p:sp>
+      <p:cxnSp>
+        <p:nvCxnSpPr>
+          <p:cNvPr id="11" name="コネクタ: カギ線 10">
+            <a:extLst>
+              <a:ext uri="{FF2B5EF4-FFF2-40B4-BE49-F238E27FC236}">
+                <a16:creationId xmlns:a16="http://schemas.microsoft.com/office/drawing/2014/main" id="{AE8DC6B8-2844-3214-C868-B7D04F6AC630}"/>
+              </a:ext>
+            </a:extLst>
+          </p:cNvPr>
+          <p:cNvCxnSpPr>
+            <a:stCxn id="3" idx="2"/>
+            <a:endCxn id="7" idx="1"/>
+          </p:cNvCxnSpPr>
+          <p:nvPr/>
+        </p:nvCxnSpPr>
+        <p:spPr>
+          <a:xfrm rot="16200000" flipH="1">
+            <a:off x="2730325" y="3009375"/>
+            <a:ext cx="1005840" cy="868680"/>
+          </a:xfrm>
+          <a:prstGeom prst="bentConnector2">
+            <a:avLst/>
+          </a:prstGeom>
+          <a:ln>
+            <a:tailEnd type="triangle"/>
+          </a:ln>
+        </p:spPr>
+        <p:style>
+          <a:lnRef idx="2">
+            <a:schemeClr val="accent1"/>
+          </a:lnRef>
+          <a:fillRef idx="0">
+            <a:schemeClr val="accent1"/>
+          </a:fillRef>
+          <a:effectRef idx="1">
+            <a:schemeClr val="accent1"/>
+          </a:effectRef>
+          <a:fontRef idx="minor">
+            <a:schemeClr val="tx1"/>
+          </a:fontRef>
+        </p:style>
+      </p:cxnSp>
+      <p:cxnSp>
+        <p:nvCxnSpPr>
+          <p:cNvPr id="13" name="コネクタ: カギ線 12">
+            <a:extLst>
+              <a:ext uri="{FF2B5EF4-FFF2-40B4-BE49-F238E27FC236}">
+                <a16:creationId xmlns:a16="http://schemas.microsoft.com/office/drawing/2014/main" id="{E1037088-F184-98A1-8B2F-C2AC733D20E5}"/>
+              </a:ext>
+            </a:extLst>
+          </p:cNvPr>
+          <p:cNvCxnSpPr>
+            <a:stCxn id="4" idx="2"/>
+            <a:endCxn id="7" idx="3"/>
+          </p:cNvCxnSpPr>
+          <p:nvPr/>
+        </p:nvCxnSpPr>
+        <p:spPr>
+          <a:xfrm rot="5400000">
+            <a:off x="8445325" y="3009375"/>
+            <a:ext cx="1005840" cy="868680"/>
+          </a:xfrm>
+          <a:prstGeom prst="bentConnector2">
+            <a:avLst/>
+          </a:prstGeom>
+          <a:ln>
+            <a:tailEnd type="triangle"/>
+          </a:ln>
+        </p:spPr>
+        <p:style>
+          <a:lnRef idx="2">
+            <a:schemeClr val="accent1"/>
+          </a:lnRef>
+          <a:fillRef idx="0">
+            <a:schemeClr val="accent1"/>
+          </a:fillRef>
+          <a:effectRef idx="1">
+            <a:schemeClr val="accent1"/>
+          </a:effectRef>
+          <a:fontRef idx="minor">
+            <a:schemeClr val="tx1"/>
+          </a:fontRef>
+        </p:style>
+      </p:cxnSp>
+      <p:cxnSp>
+        <p:nvCxnSpPr>
+          <p:cNvPr id="19" name="直線矢印コネクタ 18">
+            <a:extLst>
+              <a:ext uri="{FF2B5EF4-FFF2-40B4-BE49-F238E27FC236}">
+                <a16:creationId xmlns:a16="http://schemas.microsoft.com/office/drawing/2014/main" id="{189BEF88-4ABD-B73E-C524-BFEE730A2D61}"/>
+              </a:ext>
+            </a:extLst>
+          </p:cNvPr>
+          <p:cNvCxnSpPr>
+            <a:stCxn id="7" idx="2"/>
+            <a:endCxn id="8" idx="0"/>
+          </p:cNvCxnSpPr>
+          <p:nvPr/>
+        </p:nvCxnSpPr>
+        <p:spPr>
+          <a:xfrm>
+            <a:off x="6090745" y="4632435"/>
+            <a:ext cx="5255" cy="297180"/>
+          </a:xfrm>
+          <a:prstGeom prst="straightConnector1">
+            <a:avLst/>
+          </a:prstGeom>
+          <a:ln>
+            <a:tailEnd type="triangle"/>
+          </a:ln>
+        </p:spPr>
+        <p:style>
+          <a:lnRef idx="2">
+            <a:schemeClr val="accent1"/>
+          </a:lnRef>
+          <a:fillRef idx="0">
+            <a:schemeClr val="accent1"/>
+          </a:fillRef>
+          <a:effectRef idx="1">
+            <a:schemeClr val="accent1"/>
+          </a:effectRef>
+          <a:fontRef idx="minor">
+            <a:schemeClr val="tx1"/>
+          </a:fontRef>
+        </p:style>
+      </p:cxnSp>
+      <p:cxnSp>
+        <p:nvCxnSpPr>
+          <p:cNvPr id="24" name="直線矢印コネクタ 23">
+            <a:extLst>
+              <a:ext uri="{FF2B5EF4-FFF2-40B4-BE49-F238E27FC236}">
+                <a16:creationId xmlns:a16="http://schemas.microsoft.com/office/drawing/2014/main" id="{0F9D488C-6AF9-722F-576D-60670E79F240}"/>
+              </a:ext>
+            </a:extLst>
+          </p:cNvPr>
+          <p:cNvCxnSpPr/>
+          <p:nvPr/>
+        </p:nvCxnSpPr>
+        <p:spPr>
+          <a:xfrm>
+            <a:off x="6085490" y="6010998"/>
+            <a:ext cx="5255" cy="297180"/>
+          </a:xfrm>
+          <a:prstGeom prst="straightConnector1">
+            <a:avLst/>
+          </a:prstGeom>
+          <a:ln>
+            <a:tailEnd type="triangle"/>
+          </a:ln>
+        </p:spPr>
+        <p:style>
+          <a:lnRef idx="2">
+            <a:schemeClr val="accent1"/>
+          </a:lnRef>
+          <a:fillRef idx="0">
+            <a:schemeClr val="accent1"/>
+          </a:fillRef>
+          <a:effectRef idx="1">
+            <a:schemeClr val="accent1"/>
+          </a:effectRef>
+          <a:fontRef idx="minor">
+            <a:schemeClr val="tx1"/>
+          </a:fontRef>
+        </p:style>
+      </p:cxnSp>
     </p:spTree>
   </p:cSld>
   <p:clrMapOvr>
